--- a/GraphQL.pptx
+++ b/GraphQL.pptx
@@ -121,6 +121,11 @@
       </a:defRPr>
     </a:lvl9pPr>
   </p:defaultTextStyle>
+  <p:extLst>
+    <p:ext uri="{EFAFB233-063F-42B5-8137-9DF3F51BA10A}">
+      <p15:sldGuideLst xmlns:p15="http://schemas.microsoft.com/office/powerpoint/2012/main"/>
+    </p:ext>
+  </p:extLst>
 </p:presentation>
 </file>
 
@@ -2861,13 +2866,13 @@
       <dgm:prSet presAssocID="{586A0749-6520-42DE-AE2D-3139BCDA84F4}" presName="iconRect" presStyleLbl="node1" presStyleIdx="0" presStyleCnt="3"/>
       <dgm:spPr>
         <a:blipFill>
-          <a:blip xmlns:r="http://schemas.openxmlformats.org/officeDocument/2006/relationships" r:embed="rId1">
+          <a:blip xmlns:r="http://schemas.openxmlformats.org/officeDocument/2006/relationships">
             <a:extLst>
               <a:ext uri="{28A0092B-C50C-407E-A947-70E740481C1C}">
                 <a14:useLocalDpi xmlns:a14="http://schemas.microsoft.com/office/drawing/2010/main" val="0"/>
               </a:ext>
               <a:ext uri="{96DAC541-7B7A-43D3-8B79-37D633B846F1}">
-                <asvg:svgBlip xmlns:asvg="http://schemas.microsoft.com/office/drawing/2016/SVG/main" r:embed="rId2"/>
+                <asvg:svgBlip xmlns:asvg="http://schemas.microsoft.com/office/drawing/2016/SVG/main" r:embed="rId1"/>
               </a:ext>
             </a:extLst>
           </a:blip>
@@ -2914,13 +2919,13 @@
       <dgm:prSet presAssocID="{4AC8DC10-0E40-420D-90F5-F178294B7FDA}" presName="iconRect" presStyleLbl="node1" presStyleIdx="1" presStyleCnt="3"/>
       <dgm:spPr>
         <a:blipFill>
-          <a:blip xmlns:r="http://schemas.openxmlformats.org/officeDocument/2006/relationships" r:embed="rId3">
+          <a:blip xmlns:r="http://schemas.openxmlformats.org/officeDocument/2006/relationships">
             <a:extLst>
               <a:ext uri="{28A0092B-C50C-407E-A947-70E740481C1C}">
                 <a14:useLocalDpi xmlns:a14="http://schemas.microsoft.com/office/drawing/2010/main" val="0"/>
               </a:ext>
               <a:ext uri="{96DAC541-7B7A-43D3-8B79-37D633B846F1}">
-                <asvg:svgBlip xmlns:asvg="http://schemas.microsoft.com/office/drawing/2016/SVG/main" r:embed="rId4"/>
+                <asvg:svgBlip xmlns:asvg="http://schemas.microsoft.com/office/drawing/2016/SVG/main" r:embed="rId2"/>
               </a:ext>
             </a:extLst>
           </a:blip>
@@ -2967,13 +2972,13 @@
       <dgm:prSet presAssocID="{0C6054A7-D9AC-4002-86EF-655B8662A5CB}" presName="iconRect" presStyleLbl="node1" presStyleIdx="2" presStyleCnt="3"/>
       <dgm:spPr>
         <a:blipFill>
-          <a:blip xmlns:r="http://schemas.openxmlformats.org/officeDocument/2006/relationships" r:embed="rId5">
+          <a:blip xmlns:r="http://schemas.openxmlformats.org/officeDocument/2006/relationships">
             <a:extLst>
               <a:ext uri="{28A0092B-C50C-407E-A947-70E740481C1C}">
                 <a14:useLocalDpi xmlns:a14="http://schemas.microsoft.com/office/drawing/2010/main" val="0"/>
               </a:ext>
               <a:ext uri="{96DAC541-7B7A-43D3-8B79-37D633B846F1}">
-                <asvg:svgBlip xmlns:asvg="http://schemas.microsoft.com/office/drawing/2016/SVG/main" r:embed="rId6"/>
+                <asvg:svgBlip xmlns:asvg="http://schemas.microsoft.com/office/drawing/2016/SVG/main" r:embed="rId3"/>
               </a:ext>
             </a:extLst>
           </a:blip>
@@ -3205,13 +3210,13 @@
       <dgm:prSet presAssocID="{907938A3-756E-40B6-B2D4-D15036326413}" presName="iconRect" presStyleLbl="node1" presStyleIdx="0" presStyleCnt="3"/>
       <dgm:spPr>
         <a:blipFill>
-          <a:blip xmlns:r="http://schemas.openxmlformats.org/officeDocument/2006/relationships" r:embed="rId1">
+          <a:blip xmlns:r="http://schemas.openxmlformats.org/officeDocument/2006/relationships">
             <a:extLst>
               <a:ext uri="{28A0092B-C50C-407E-A947-70E740481C1C}">
                 <a14:useLocalDpi xmlns:a14="http://schemas.microsoft.com/office/drawing/2010/main" val="0"/>
               </a:ext>
               <a:ext uri="{96DAC541-7B7A-43D3-8B79-37D633B846F1}">
-                <asvg:svgBlip xmlns:asvg="http://schemas.microsoft.com/office/drawing/2016/SVG/main" r:embed="rId2"/>
+                <asvg:svgBlip xmlns:asvg="http://schemas.microsoft.com/office/drawing/2016/SVG/main" r:embed="rId1"/>
               </a:ext>
             </a:extLst>
           </a:blip>
@@ -3258,13 +3263,13 @@
       <dgm:prSet presAssocID="{15AE864C-B608-4100-ACD3-53478D7639FB}" presName="iconRect" presStyleLbl="node1" presStyleIdx="1" presStyleCnt="3"/>
       <dgm:spPr>
         <a:blipFill>
-          <a:blip xmlns:r="http://schemas.openxmlformats.org/officeDocument/2006/relationships" r:embed="rId3">
+          <a:blip xmlns:r="http://schemas.openxmlformats.org/officeDocument/2006/relationships">
             <a:extLst>
               <a:ext uri="{28A0092B-C50C-407E-A947-70E740481C1C}">
                 <a14:useLocalDpi xmlns:a14="http://schemas.microsoft.com/office/drawing/2010/main" val="0"/>
               </a:ext>
               <a:ext uri="{96DAC541-7B7A-43D3-8B79-37D633B846F1}">
-                <asvg:svgBlip xmlns:asvg="http://schemas.microsoft.com/office/drawing/2016/SVG/main" r:embed="rId4"/>
+                <asvg:svgBlip xmlns:asvg="http://schemas.microsoft.com/office/drawing/2016/SVG/main" r:embed="rId2"/>
               </a:ext>
             </a:extLst>
           </a:blip>
@@ -3311,13 +3316,13 @@
       <dgm:prSet presAssocID="{E6732F7A-D248-45BC-9817-170C10CB3FB4}" presName="iconRect" presStyleLbl="node1" presStyleIdx="2" presStyleCnt="3"/>
       <dgm:spPr>
         <a:blipFill>
-          <a:blip xmlns:r="http://schemas.openxmlformats.org/officeDocument/2006/relationships" r:embed="rId5">
+          <a:blip xmlns:r="http://schemas.openxmlformats.org/officeDocument/2006/relationships">
             <a:extLst>
               <a:ext uri="{28A0092B-C50C-407E-A947-70E740481C1C}">
                 <a14:useLocalDpi xmlns:a14="http://schemas.microsoft.com/office/drawing/2010/main" val="0"/>
               </a:ext>
               <a:ext uri="{96DAC541-7B7A-43D3-8B79-37D633B846F1}">
-                <asvg:svgBlip xmlns:asvg="http://schemas.microsoft.com/office/drawing/2016/SVG/main" r:embed="rId6"/>
+                <asvg:svgBlip xmlns:asvg="http://schemas.microsoft.com/office/drawing/2016/SVG/main" r:embed="rId3"/>
               </a:ext>
             </a:extLst>
           </a:blip>
@@ -3500,13 +3505,13 @@
       <dgm:prSet presAssocID="{95CA523B-D271-4D3F-B9C1-8D90F8FEEADA}" presName="iconRect" presStyleLbl="node1" presStyleIdx="0" presStyleCnt="2"/>
       <dgm:spPr>
         <a:blipFill>
-          <a:blip xmlns:r="http://schemas.openxmlformats.org/officeDocument/2006/relationships" r:embed="rId1">
+          <a:blip xmlns:r="http://schemas.openxmlformats.org/officeDocument/2006/relationships">
             <a:extLst>
               <a:ext uri="{28A0092B-C50C-407E-A947-70E740481C1C}">
                 <a14:useLocalDpi xmlns:a14="http://schemas.microsoft.com/office/drawing/2010/main" val="0"/>
               </a:ext>
               <a:ext uri="{96DAC541-7B7A-43D3-8B79-37D633B846F1}">
-                <asvg:svgBlip xmlns:asvg="http://schemas.microsoft.com/office/drawing/2016/SVG/main" r:embed="rId2"/>
+                <asvg:svgBlip xmlns:asvg="http://schemas.microsoft.com/office/drawing/2016/SVG/main" r:embed="rId1"/>
               </a:ext>
             </a:extLst>
           </a:blip>
@@ -3553,13 +3558,13 @@
       <dgm:prSet presAssocID="{8C03A645-B6E4-4829-9C61-A12747A5A543}" presName="iconRect" presStyleLbl="node1" presStyleIdx="1" presStyleCnt="2"/>
       <dgm:spPr>
         <a:blipFill>
-          <a:blip xmlns:r="http://schemas.openxmlformats.org/officeDocument/2006/relationships" r:embed="rId3">
+          <a:blip xmlns:r="http://schemas.openxmlformats.org/officeDocument/2006/relationships">
             <a:extLst>
               <a:ext uri="{28A0092B-C50C-407E-A947-70E740481C1C}">
                 <a14:useLocalDpi xmlns:a14="http://schemas.microsoft.com/office/drawing/2010/main" val="0"/>
               </a:ext>
               <a:ext uri="{96DAC541-7B7A-43D3-8B79-37D633B846F1}">
-                <asvg:svgBlip xmlns:asvg="http://schemas.microsoft.com/office/drawing/2016/SVG/main" r:embed="rId4"/>
+                <asvg:svgBlip xmlns:asvg="http://schemas.microsoft.com/office/drawing/2016/SVG/main" r:embed="rId2"/>
               </a:ext>
             </a:extLst>
           </a:blip>
@@ -3683,13 +3688,13 @@
           <a:avLst/>
         </a:prstGeom>
         <a:blipFill>
-          <a:blip xmlns:r="http://schemas.openxmlformats.org/officeDocument/2006/relationships" r:embed="rId1">
+          <a:blip xmlns:r="http://schemas.openxmlformats.org/officeDocument/2006/relationships">
             <a:extLst>
               <a:ext uri="{28A0092B-C50C-407E-A947-70E740481C1C}">
                 <a14:useLocalDpi xmlns:a14="http://schemas.microsoft.com/office/drawing/2010/main" val="0"/>
               </a:ext>
               <a:ext uri="{96DAC541-7B7A-43D3-8B79-37D633B846F1}">
-                <asvg:svgBlip xmlns:asvg="http://schemas.microsoft.com/office/drawing/2016/SVG/main" r:embed="rId2"/>
+                <asvg:svgBlip xmlns:asvg="http://schemas.microsoft.com/office/drawing/2016/SVG/main" r:embed="rId1"/>
               </a:ext>
             </a:extLst>
           </a:blip>
@@ -3836,13 +3841,13 @@
           <a:avLst/>
         </a:prstGeom>
         <a:blipFill>
-          <a:blip xmlns:r="http://schemas.openxmlformats.org/officeDocument/2006/relationships" r:embed="rId3">
+          <a:blip xmlns:r="http://schemas.openxmlformats.org/officeDocument/2006/relationships">
             <a:extLst>
               <a:ext uri="{28A0092B-C50C-407E-A947-70E740481C1C}">
                 <a14:useLocalDpi xmlns:a14="http://schemas.microsoft.com/office/drawing/2010/main" val="0"/>
               </a:ext>
               <a:ext uri="{96DAC541-7B7A-43D3-8B79-37D633B846F1}">
-                <asvg:svgBlip xmlns:asvg="http://schemas.microsoft.com/office/drawing/2016/SVG/main" r:embed="rId4"/>
+                <asvg:svgBlip xmlns:asvg="http://schemas.microsoft.com/office/drawing/2016/SVG/main" r:embed="rId2"/>
               </a:ext>
             </a:extLst>
           </a:blip>
@@ -3989,13 +3994,13 @@
           <a:avLst/>
         </a:prstGeom>
         <a:blipFill>
-          <a:blip xmlns:r="http://schemas.openxmlformats.org/officeDocument/2006/relationships" r:embed="rId5">
+          <a:blip xmlns:r="http://schemas.openxmlformats.org/officeDocument/2006/relationships">
             <a:extLst>
               <a:ext uri="{28A0092B-C50C-407E-A947-70E740481C1C}">
                 <a14:useLocalDpi xmlns:a14="http://schemas.microsoft.com/office/drawing/2010/main" val="0"/>
               </a:ext>
               <a:ext uri="{96DAC541-7B7A-43D3-8B79-37D633B846F1}">
-                <asvg:svgBlip xmlns:asvg="http://schemas.microsoft.com/office/drawing/2016/SVG/main" r:embed="rId6"/>
+                <asvg:svgBlip xmlns:asvg="http://schemas.microsoft.com/office/drawing/2016/SVG/main" r:embed="rId3"/>
               </a:ext>
             </a:extLst>
           </a:blip>
@@ -4105,7 +4110,7 @@
       </dsp:nvSpPr>
       <dsp:spPr>
         <a:xfrm>
-          <a:off x="629393" y="56982"/>
+          <a:off x="629393" y="56981"/>
           <a:ext cx="1852875" cy="1852875"/>
         </a:xfrm>
         <a:prstGeom prst="ellipse">
@@ -4144,20 +4149,20 @@
       </dsp:nvSpPr>
       <dsp:spPr>
         <a:xfrm>
-          <a:off x="1024268" y="451857"/>
-          <a:ext cx="1063124" cy="1063124"/>
+          <a:off x="1024268" y="451856"/>
+          <a:ext cx="1063125" cy="1063125"/>
         </a:xfrm>
         <a:prstGeom prst="rect">
           <a:avLst/>
         </a:prstGeom>
         <a:blipFill>
-          <a:blip xmlns:r="http://schemas.openxmlformats.org/officeDocument/2006/relationships" r:embed="rId1">
+          <a:blip xmlns:r="http://schemas.openxmlformats.org/officeDocument/2006/relationships">
             <a:extLst>
               <a:ext uri="{28A0092B-C50C-407E-A947-70E740481C1C}">
                 <a14:useLocalDpi xmlns:a14="http://schemas.microsoft.com/office/drawing/2010/main" val="0"/>
               </a:ext>
               <a:ext uri="{96DAC541-7B7A-43D3-8B79-37D633B846F1}">
-                <asvg:svgBlip xmlns:asvg="http://schemas.microsoft.com/office/drawing/2016/SVG/main" r:embed="rId2"/>
+                <asvg:svgBlip xmlns:asvg="http://schemas.microsoft.com/office/drawing/2016/SVG/main" r:embed="rId1"/>
               </a:ext>
             </a:extLst>
           </a:blip>
@@ -4194,7 +4199,7 @@
       </dsp:nvSpPr>
       <dsp:spPr>
         <a:xfrm>
-          <a:off x="37080" y="2486981"/>
+          <a:off x="37080" y="2486982"/>
           <a:ext cx="3037500" cy="720000"/>
         </a:xfrm>
         <a:prstGeom prst="rect">
@@ -4245,7 +4250,7 @@
         </a:p>
       </dsp:txBody>
       <dsp:txXfrm>
-        <a:off x="37080" y="2486981"/>
+        <a:off x="37080" y="2486982"/>
         <a:ext cx="3037500" cy="720000"/>
       </dsp:txXfrm>
     </dsp:sp>
@@ -4256,7 +4261,7 @@
       </dsp:nvSpPr>
       <dsp:spPr>
         <a:xfrm>
-          <a:off x="4198456" y="56982"/>
+          <a:off x="4198456" y="56981"/>
           <a:ext cx="1852875" cy="1852875"/>
         </a:xfrm>
         <a:prstGeom prst="ellipse">
@@ -4295,20 +4300,20 @@
       </dsp:nvSpPr>
       <dsp:spPr>
         <a:xfrm>
-          <a:off x="4593331" y="451857"/>
-          <a:ext cx="1063124" cy="1063124"/>
+          <a:off x="4593331" y="451856"/>
+          <a:ext cx="1063125" cy="1063125"/>
         </a:xfrm>
         <a:prstGeom prst="rect">
           <a:avLst/>
         </a:prstGeom>
         <a:blipFill>
-          <a:blip xmlns:r="http://schemas.openxmlformats.org/officeDocument/2006/relationships" r:embed="rId3">
+          <a:blip xmlns:r="http://schemas.openxmlformats.org/officeDocument/2006/relationships">
             <a:extLst>
               <a:ext uri="{28A0092B-C50C-407E-A947-70E740481C1C}">
                 <a14:useLocalDpi xmlns:a14="http://schemas.microsoft.com/office/drawing/2010/main" val="0"/>
               </a:ext>
               <a:ext uri="{96DAC541-7B7A-43D3-8B79-37D633B846F1}">
-                <asvg:svgBlip xmlns:asvg="http://schemas.microsoft.com/office/drawing/2016/SVG/main" r:embed="rId4"/>
+                <asvg:svgBlip xmlns:asvg="http://schemas.microsoft.com/office/drawing/2016/SVG/main" r:embed="rId2"/>
               </a:ext>
             </a:extLst>
           </a:blip>
@@ -4345,7 +4350,7 @@
       </dsp:nvSpPr>
       <dsp:spPr>
         <a:xfrm>
-          <a:off x="3606143" y="2486981"/>
+          <a:off x="3606143" y="2486982"/>
           <a:ext cx="3037500" cy="720000"/>
         </a:xfrm>
         <a:prstGeom prst="rect">
@@ -4396,7 +4401,7 @@
         </a:p>
       </dsp:txBody>
       <dsp:txXfrm>
-        <a:off x="3606143" y="2486981"/>
+        <a:off x="3606143" y="2486982"/>
         <a:ext cx="3037500" cy="720000"/>
       </dsp:txXfrm>
     </dsp:sp>
@@ -4407,7 +4412,7 @@
       </dsp:nvSpPr>
       <dsp:spPr>
         <a:xfrm>
-          <a:off x="7767518" y="56982"/>
+          <a:off x="7767518" y="56981"/>
           <a:ext cx="1852875" cy="1852875"/>
         </a:xfrm>
         <a:prstGeom prst="ellipse">
@@ -4446,20 +4451,20 @@
       </dsp:nvSpPr>
       <dsp:spPr>
         <a:xfrm>
-          <a:off x="8162393" y="451857"/>
-          <a:ext cx="1063124" cy="1063124"/>
+          <a:off x="8162393" y="451856"/>
+          <a:ext cx="1063125" cy="1063125"/>
         </a:xfrm>
         <a:prstGeom prst="rect">
           <a:avLst/>
         </a:prstGeom>
         <a:blipFill>
-          <a:blip xmlns:r="http://schemas.openxmlformats.org/officeDocument/2006/relationships" r:embed="rId5">
+          <a:blip xmlns:r="http://schemas.openxmlformats.org/officeDocument/2006/relationships">
             <a:extLst>
               <a:ext uri="{28A0092B-C50C-407E-A947-70E740481C1C}">
                 <a14:useLocalDpi xmlns:a14="http://schemas.microsoft.com/office/drawing/2010/main" val="0"/>
               </a:ext>
               <a:ext uri="{96DAC541-7B7A-43D3-8B79-37D633B846F1}">
-                <asvg:svgBlip xmlns:asvg="http://schemas.microsoft.com/office/drawing/2016/SVG/main" r:embed="rId6"/>
+                <asvg:svgBlip xmlns:asvg="http://schemas.microsoft.com/office/drawing/2016/SVG/main" r:embed="rId3"/>
               </a:ext>
             </a:extLst>
           </a:blip>
@@ -4496,7 +4501,7 @@
       </dsp:nvSpPr>
       <dsp:spPr>
         <a:xfrm>
-          <a:off x="7175206" y="2486981"/>
+          <a:off x="7175206" y="2486982"/>
           <a:ext cx="3037500" cy="720000"/>
         </a:xfrm>
         <a:prstGeom prst="rect">
@@ -4547,7 +4552,7 @@
         </a:p>
       </dsp:txBody>
       <dsp:txXfrm>
-        <a:off x="7175206" y="2486981"/>
+        <a:off x="7175206" y="2486982"/>
         <a:ext cx="3037500" cy="720000"/>
       </dsp:txXfrm>
     </dsp:sp>
@@ -4570,7 +4575,7 @@
       </dsp:nvSpPr>
       <dsp:spPr>
         <a:xfrm>
-          <a:off x="2313518" y="11982"/>
+          <a:off x="2313518" y="11981"/>
           <a:ext cx="1921500" cy="1921500"/>
         </a:xfrm>
         <a:prstGeom prst="ellipse">
@@ -4609,20 +4614,20 @@
       </dsp:nvSpPr>
       <dsp:spPr>
         <a:xfrm>
-          <a:off x="2723018" y="421482"/>
-          <a:ext cx="1102499" cy="1102499"/>
+          <a:off x="2723018" y="421481"/>
+          <a:ext cx="1102500" cy="1102500"/>
         </a:xfrm>
         <a:prstGeom prst="rect">
           <a:avLst/>
         </a:prstGeom>
         <a:blipFill>
-          <a:blip xmlns:r="http://schemas.openxmlformats.org/officeDocument/2006/relationships" r:embed="rId1">
+          <a:blip xmlns:r="http://schemas.openxmlformats.org/officeDocument/2006/relationships">
             <a:extLst>
               <a:ext uri="{28A0092B-C50C-407E-A947-70E740481C1C}">
                 <a14:useLocalDpi xmlns:a14="http://schemas.microsoft.com/office/drawing/2010/main" val="0"/>
               </a:ext>
               <a:ext uri="{96DAC541-7B7A-43D3-8B79-37D633B846F1}">
-                <asvg:svgBlip xmlns:asvg="http://schemas.microsoft.com/office/drawing/2016/SVG/main" r:embed="rId2"/>
+                <asvg:svgBlip xmlns:asvg="http://schemas.microsoft.com/office/drawing/2016/SVG/main" r:embed="rId1"/>
               </a:ext>
             </a:extLst>
           </a:blip>
@@ -4659,7 +4664,7 @@
       </dsp:nvSpPr>
       <dsp:spPr>
         <a:xfrm>
-          <a:off x="1699268" y="2531981"/>
+          <a:off x="1699268" y="2531982"/>
           <a:ext cx="3150000" cy="720000"/>
         </a:xfrm>
         <a:prstGeom prst="rect">
@@ -4710,7 +4715,7 @@
         </a:p>
       </dsp:txBody>
       <dsp:txXfrm>
-        <a:off x="1699268" y="2531981"/>
+        <a:off x="1699268" y="2531982"/>
         <a:ext cx="3150000" cy="720000"/>
       </dsp:txXfrm>
     </dsp:sp>
@@ -4721,7 +4726,7 @@
       </dsp:nvSpPr>
       <dsp:spPr>
         <a:xfrm>
-          <a:off x="6014768" y="11982"/>
+          <a:off x="6014768" y="11981"/>
           <a:ext cx="1921500" cy="1921500"/>
         </a:xfrm>
         <a:prstGeom prst="ellipse">
@@ -4760,20 +4765,20 @@
       </dsp:nvSpPr>
       <dsp:spPr>
         <a:xfrm>
-          <a:off x="6424268" y="421482"/>
-          <a:ext cx="1102499" cy="1102499"/>
+          <a:off x="6424268" y="421481"/>
+          <a:ext cx="1102500" cy="1102500"/>
         </a:xfrm>
         <a:prstGeom prst="rect">
           <a:avLst/>
         </a:prstGeom>
         <a:blipFill>
-          <a:blip xmlns:r="http://schemas.openxmlformats.org/officeDocument/2006/relationships" r:embed="rId3">
+          <a:blip xmlns:r="http://schemas.openxmlformats.org/officeDocument/2006/relationships">
             <a:extLst>
               <a:ext uri="{28A0092B-C50C-407E-A947-70E740481C1C}">
                 <a14:useLocalDpi xmlns:a14="http://schemas.microsoft.com/office/drawing/2010/main" val="0"/>
               </a:ext>
               <a:ext uri="{96DAC541-7B7A-43D3-8B79-37D633B846F1}">
-                <asvg:svgBlip xmlns:asvg="http://schemas.microsoft.com/office/drawing/2016/SVG/main" r:embed="rId4"/>
+                <asvg:svgBlip xmlns:asvg="http://schemas.microsoft.com/office/drawing/2016/SVG/main" r:embed="rId2"/>
               </a:ext>
             </a:extLst>
           </a:blip>
@@ -4810,7 +4815,7 @@
       </dsp:nvSpPr>
       <dsp:spPr>
         <a:xfrm>
-          <a:off x="5400518" y="2531981"/>
+          <a:off x="5400518" y="2531982"/>
           <a:ext cx="3150000" cy="720000"/>
         </a:xfrm>
         <a:prstGeom prst="rect">
@@ -4861,7 +4866,7 @@
         </a:p>
       </dsp:txBody>
       <dsp:txXfrm>
-        <a:off x="5400518" y="2531981"/>
+        <a:off x="5400518" y="2531982"/>
         <a:ext cx="3150000" cy="720000"/>
       </dsp:txXfrm>
     </dsp:sp>
@@ -10883,7 +10888,7 @@
             <a:fld id="{A5B0A250-5CC0-1746-B209-08E8B0DAE6AF}" type="datetimeFigureOut">
               <a:rPr lang="en-US" smtClean="0"/>
               <a:pPr algn="l"/>
-              <a:t>2/26/26</a:t>
+              <a:t>6/30/26</a:t>
             </a:fld>
             <a:endParaRPr lang="en-US" dirty="0"/>
           </a:p>
@@ -12345,7 +12350,7 @@
           <a:p>
             <a:fld id="{A5B0A250-5CC0-1746-B209-08E8B0DAE6AF}" type="datetimeFigureOut">
               <a:rPr lang="en-US" smtClean="0"/>
-              <a:t>2/26/26</a:t>
+              <a:t>6/30/26</a:t>
             </a:fld>
             <a:endParaRPr lang="en-US" dirty="0"/>
           </a:p>
@@ -13275,7 +13280,7 @@
           <a:p>
             <a:fld id="{A5B0A250-5CC0-1746-B209-08E8B0DAE6AF}" type="datetimeFigureOut">
               <a:rPr lang="en-US" smtClean="0"/>
-              <a:t>2/26/26</a:t>
+              <a:t>6/30/26</a:t>
             </a:fld>
             <a:endParaRPr lang="en-US"/>
           </a:p>
@@ -14732,7 +14737,7 @@
           <a:p>
             <a:fld id="{A5B0A250-5CC0-1746-B209-08E8B0DAE6AF}" type="datetimeFigureOut">
               <a:rPr lang="en-US" smtClean="0"/>
-              <a:t>2/26/26</a:t>
+              <a:t>6/30/26</a:t>
             </a:fld>
             <a:endParaRPr lang="en-US" dirty="0"/>
           </a:p>
@@ -17088,7 +17093,7 @@
           <a:p>
             <a:fld id="{A5B0A250-5CC0-1746-B209-08E8B0DAE6AF}" type="datetimeFigureOut">
               <a:rPr lang="en-US" smtClean="0"/>
-              <a:t>2/26/26</a:t>
+              <a:t>6/30/26</a:t>
             </a:fld>
             <a:endParaRPr lang="en-US" dirty="0"/>
           </a:p>
@@ -18129,7 +18134,7 @@
           <a:p>
             <a:fld id="{A5B0A250-5CC0-1746-B209-08E8B0DAE6AF}" type="datetimeFigureOut">
               <a:rPr lang="en-US" smtClean="0"/>
-              <a:t>2/26/26</a:t>
+              <a:t>6/30/26</a:t>
             </a:fld>
             <a:endParaRPr lang="en-US" dirty="0"/>
           </a:p>
@@ -19342,7 +19347,7 @@
           <a:p>
             <a:fld id="{A5B0A250-5CC0-1746-B209-08E8B0DAE6AF}" type="datetimeFigureOut">
               <a:rPr lang="en-US" smtClean="0"/>
-              <a:t>2/26/26</a:t>
+              <a:t>6/30/26</a:t>
             </a:fld>
             <a:endParaRPr lang="en-US" dirty="0"/>
           </a:p>
@@ -20251,7 +20256,7 @@
           <a:p>
             <a:fld id="{A5B0A250-5CC0-1746-B209-08E8B0DAE6AF}" type="datetimeFigureOut">
               <a:rPr lang="en-US" smtClean="0"/>
-              <a:t>2/26/26</a:t>
+              <a:t>6/30/26</a:t>
             </a:fld>
             <a:endParaRPr lang="en-US" dirty="0"/>
           </a:p>
@@ -20410,7 +20415,7 @@
             <a:fld id="{A5B0A250-5CC0-1746-B209-08E8B0DAE6AF}" type="datetimeFigureOut">
               <a:rPr lang="en-US" smtClean="0"/>
               <a:pPr/>
-              <a:t>2/26/26</a:t>
+              <a:t>6/30/26</a:t>
             </a:fld>
             <a:endParaRPr lang="en-US" dirty="0"/>
           </a:p>
@@ -21393,7 +21398,7 @@
           <a:p>
             <a:fld id="{A5B0A250-5CC0-1746-B209-08E8B0DAE6AF}" type="datetimeFigureOut">
               <a:rPr lang="en-US" smtClean="0"/>
-              <a:t>2/26/26</a:t>
+              <a:t>6/30/26</a:t>
             </a:fld>
             <a:endParaRPr lang="en-US" dirty="0"/>
           </a:p>
@@ -22455,7 +22460,7 @@
           <a:p>
             <a:fld id="{A5B0A250-5CC0-1746-B209-08E8B0DAE6AF}" type="datetimeFigureOut">
               <a:rPr lang="en-US" smtClean="0"/>
-              <a:t>2/26/26</a:t>
+              <a:t>6/30/26</a:t>
             </a:fld>
             <a:endParaRPr lang="en-US" dirty="0"/>
           </a:p>
@@ -22743,7 +22748,7 @@
             <a:fld id="{A5B0A250-5CC0-1746-B209-08E8B0DAE6AF}" type="datetimeFigureOut">
               <a:rPr lang="en-US" smtClean="0"/>
               <a:pPr/>
-              <a:t>2/26/26</a:t>
+              <a:t>6/30/26</a:t>
             </a:fld>
             <a:endParaRPr lang="en-US" dirty="0"/>
           </a:p>
@@ -23970,6 +23975,36 @@
           </a:fontRef>
         </p:style>
       </p:cxnSp>
+      <p:pic>
+        <p:nvPicPr>
+          <p:cNvPr id="4" name="Imagen 3">
+            <a:extLst>
+              <a:ext uri="{FF2B5EF4-FFF2-40B4-BE49-F238E27FC236}">
+                <a16:creationId xmlns:a16="http://schemas.microsoft.com/office/drawing/2014/main" id="{64D60F08-DF12-A8FB-F474-8A4C3C75C222}"/>
+              </a:ext>
+            </a:extLst>
+          </p:cNvPr>
+          <p:cNvPicPr>
+            <a:picLocks noChangeAspect="1"/>
+          </p:cNvPicPr>
+          <p:nvPr/>
+        </p:nvPicPr>
+        <p:blipFill>
+          <a:blip r:embed="rId3"/>
+          <a:stretch>
+            <a:fillRect/>
+          </a:stretch>
+        </p:blipFill>
+        <p:spPr>
+          <a:xfrm>
+            <a:off x="127110" y="113030"/>
+            <a:ext cx="2019237" cy="863573"/>
+          </a:xfrm>
+          <a:prstGeom prst="rect">
+            <a:avLst/>
+          </a:prstGeom>
+        </p:spPr>
+      </p:pic>
     </p:spTree>
     <p:extLst>
       <p:ext uri="{BB962C8B-B14F-4D97-AF65-F5344CB8AC3E}">
@@ -40410,7 +40445,7 @@
             </a:pPr>
             <a:r>
               <a:rPr lang="es-PE" dirty="0"/>
-              <a:t>Demo (query, mutation, nested queries)</a:t>
+              <a:t>Demo (query, mutation)</a:t>
             </a:r>
           </a:p>
         </p:txBody>
@@ -46314,13 +46349,6 @@
               </a:rPr>
               <a:t>Operaciones:</a:t>
             </a:r>
-            <a:endParaRPr kumimoji="0" lang="es-PE" altLang="es-PE" b="1" i="0" u="none" strike="noStrike" cap="none" normalizeH="0" baseline="0">
-              <a:ln>
-                <a:noFill/>
-              </a:ln>
-              <a:effectLst/>
-              <a:latin typeface="Arial" panose="020B0604020202020204" pitchFamily="34" charset="0"/>
-            </a:endParaRPr>
           </a:p>
           <a:p>
             <a:pPr eaLnBrk="0" fontAlgn="base" hangingPunct="0">
@@ -46341,13 +46369,6 @@
               </a:rPr>
               <a:t>Queries: Para obtener datos.</a:t>
             </a:r>
-            <a:endParaRPr kumimoji="0" lang="es-PE" altLang="es-PE" i="0" u="none" strike="noStrike" cap="none" normalizeH="0" baseline="0">
-              <a:ln>
-                <a:noFill/>
-              </a:ln>
-              <a:effectLst/>
-              <a:latin typeface="Arial" panose="020B0604020202020204" pitchFamily="34" charset="0"/>
-            </a:endParaRPr>
           </a:p>
           <a:p>
             <a:pPr eaLnBrk="0" fontAlgn="base" hangingPunct="0">
@@ -46366,36 +46387,15 @@
                 <a:effectLst/>
                 <a:latin typeface="Arial" panose="020B0604020202020204" pitchFamily="34" charset="0"/>
               </a:rPr>
-              <a:t>Mutations: Para modificar datos.</a:t>
+              <a:t>Mutations: Para modificar datos</a:t>
             </a:r>
-            <a:endParaRPr kumimoji="0" lang="es-PE" altLang="es-PE" i="0" u="none" strike="noStrike" cap="none" normalizeH="0" baseline="0">
-              <a:ln>
-                <a:noFill/>
-              </a:ln>
-              <a:effectLst/>
-              <a:latin typeface="Arial" panose="020B0604020202020204" pitchFamily="34" charset="0"/>
-            </a:endParaRPr>
-          </a:p>
-          <a:p>
-            <a:pPr eaLnBrk="0" fontAlgn="base" hangingPunct="0">
-              <a:spcBef>
-                <a:spcPct val="0"/>
-              </a:spcBef>
-              <a:spcAft>
-                <a:spcPts val="600"/>
-              </a:spcAft>
-            </a:pPr>
             <a:r>
-              <a:rPr kumimoji="0" lang="es-PE" altLang="es-PE" i="0" u="none" strike="noStrike" cap="none" normalizeH="0" baseline="0" dirty="0">
-                <a:ln>
-                  <a:noFill/>
-                </a:ln>
-                <a:effectLst/>
+              <a:rPr lang="es-PE" altLang="es-PE" dirty="0">
                 <a:latin typeface="Arial" panose="020B0604020202020204" pitchFamily="34" charset="0"/>
               </a:rPr>
-              <a:t>Subscriptions: Para recibir actualizaciones en tiempo real.</a:t>
+              <a:t>.</a:t>
             </a:r>
-            <a:endParaRPr kumimoji="0" lang="es-PE" altLang="es-PE" i="0" u="none" strike="noStrike" cap="none" normalizeH="0" baseline="0">
+            <a:endParaRPr kumimoji="0" lang="es-PE" altLang="es-PE" i="0" u="none" strike="noStrike" cap="none" normalizeH="0" baseline="0" dirty="0">
               <a:ln>
                 <a:noFill/>
               </a:ln>

--- a/GraphQL.pptx
+++ b/GraphQL.pptx
@@ -23997,7 +23997,7 @@
         </p:blipFill>
         <p:spPr>
           <a:xfrm>
-            <a:off x="127110" y="113030"/>
+            <a:off x="127110" y="131111"/>
             <a:ext cx="2019237" cy="863573"/>
           </a:xfrm>
           <a:prstGeom prst="rect">
@@ -24788,6 +24788,36 @@
           </a:fontRef>
         </p:style>
       </p:cxnSp>
+      <p:pic>
+        <p:nvPicPr>
+          <p:cNvPr id="4" name="Imagen 3">
+            <a:extLst>
+              <a:ext uri="{FF2B5EF4-FFF2-40B4-BE49-F238E27FC236}">
+                <a16:creationId xmlns:a16="http://schemas.microsoft.com/office/drawing/2014/main" id="{A122DC2C-170C-5AD4-381C-B6CAC30C0720}"/>
+              </a:ext>
+            </a:extLst>
+          </p:cNvPr>
+          <p:cNvPicPr>
+            <a:picLocks noChangeAspect="1"/>
+          </p:cNvPicPr>
+          <p:nvPr/>
+        </p:nvPicPr>
+        <p:blipFill>
+          <a:blip r:embed="rId3"/>
+          <a:stretch>
+            <a:fillRect/>
+          </a:stretch>
+        </p:blipFill>
+        <p:spPr>
+          <a:xfrm>
+            <a:off x="10758767" y="6131363"/>
+            <a:ext cx="1324544" cy="566472"/>
+          </a:xfrm>
+          <a:prstGeom prst="rect">
+            <a:avLst/>
+          </a:prstGeom>
+        </p:spPr>
+      </p:pic>
     </p:spTree>
     <p:extLst>
       <p:ext uri="{BB962C8B-B14F-4D97-AF65-F5344CB8AC3E}">
@@ -28162,6 +28192,36 @@
           </a:fontRef>
         </p:style>
       </p:cxnSp>
+      <p:pic>
+        <p:nvPicPr>
+          <p:cNvPr id="4" name="Imagen 3">
+            <a:extLst>
+              <a:ext uri="{FF2B5EF4-FFF2-40B4-BE49-F238E27FC236}">
+                <a16:creationId xmlns:a16="http://schemas.microsoft.com/office/drawing/2014/main" id="{CB86064D-9198-177A-5D8A-8CC120013D06}"/>
+              </a:ext>
+            </a:extLst>
+          </p:cNvPr>
+          <p:cNvPicPr>
+            <a:picLocks noChangeAspect="1"/>
+          </p:cNvPicPr>
+          <p:nvPr/>
+        </p:nvPicPr>
+        <p:blipFill>
+          <a:blip r:embed="rId3"/>
+          <a:stretch>
+            <a:fillRect/>
+          </a:stretch>
+        </p:blipFill>
+        <p:spPr>
+          <a:xfrm>
+            <a:off x="10758767" y="6131363"/>
+            <a:ext cx="1324544" cy="566472"/>
+          </a:xfrm>
+          <a:prstGeom prst="rect">
+            <a:avLst/>
+          </a:prstGeom>
+        </p:spPr>
+      </p:pic>
     </p:spTree>
     <p:extLst>
       <p:ext uri="{BB962C8B-B14F-4D97-AF65-F5344CB8AC3E}">
@@ -31536,6 +31596,36 @@
           </a:fontRef>
         </p:style>
       </p:cxnSp>
+      <p:pic>
+        <p:nvPicPr>
+          <p:cNvPr id="5" name="Imagen 4">
+            <a:extLst>
+              <a:ext uri="{FF2B5EF4-FFF2-40B4-BE49-F238E27FC236}">
+                <a16:creationId xmlns:a16="http://schemas.microsoft.com/office/drawing/2014/main" id="{559083BF-17CD-90E9-3B26-C455276E1961}"/>
+              </a:ext>
+            </a:extLst>
+          </p:cNvPr>
+          <p:cNvPicPr>
+            <a:picLocks noChangeAspect="1"/>
+          </p:cNvPicPr>
+          <p:nvPr/>
+        </p:nvPicPr>
+        <p:blipFill>
+          <a:blip r:embed="rId3"/>
+          <a:stretch>
+            <a:fillRect/>
+          </a:stretch>
+        </p:blipFill>
+        <p:spPr>
+          <a:xfrm>
+            <a:off x="10758767" y="6131363"/>
+            <a:ext cx="1324544" cy="566472"/>
+          </a:xfrm>
+          <a:prstGeom prst="rect">
+            <a:avLst/>
+          </a:prstGeom>
+        </p:spPr>
+      </p:pic>
     </p:spTree>
     <p:extLst>
       <p:ext uri="{BB962C8B-B14F-4D97-AF65-F5344CB8AC3E}">
@@ -32321,6 +32411,36 @@
           </a:fontRef>
         </p:style>
       </p:cxnSp>
+      <p:pic>
+        <p:nvPicPr>
+          <p:cNvPr id="4" name="Imagen 3">
+            <a:extLst>
+              <a:ext uri="{FF2B5EF4-FFF2-40B4-BE49-F238E27FC236}">
+                <a16:creationId xmlns:a16="http://schemas.microsoft.com/office/drawing/2014/main" id="{DEE84ABE-678B-D859-3C3A-F153C79511F3}"/>
+              </a:ext>
+            </a:extLst>
+          </p:cNvPr>
+          <p:cNvPicPr>
+            <a:picLocks noChangeAspect="1"/>
+          </p:cNvPicPr>
+          <p:nvPr/>
+        </p:nvPicPr>
+        <p:blipFill>
+          <a:blip r:embed="rId3"/>
+          <a:stretch>
+            <a:fillRect/>
+          </a:stretch>
+        </p:blipFill>
+        <p:spPr>
+          <a:xfrm>
+            <a:off x="10758767" y="6131363"/>
+            <a:ext cx="1324544" cy="566472"/>
+          </a:xfrm>
+          <a:prstGeom prst="rect">
+            <a:avLst/>
+          </a:prstGeom>
+        </p:spPr>
+      </p:pic>
     </p:spTree>
     <p:extLst>
       <p:ext uri="{BB962C8B-B14F-4D97-AF65-F5344CB8AC3E}">
@@ -32539,6 +32659,36 @@
           </a:graphicData>
         </a:graphic>
       </p:graphicFrame>
+      <p:pic>
+        <p:nvPicPr>
+          <p:cNvPr id="3" name="Imagen 2">
+            <a:extLst>
+              <a:ext uri="{FF2B5EF4-FFF2-40B4-BE49-F238E27FC236}">
+                <a16:creationId xmlns:a16="http://schemas.microsoft.com/office/drawing/2014/main" id="{AC0B5270-21D7-56FF-4D9A-0E14A424092A}"/>
+              </a:ext>
+            </a:extLst>
+          </p:cNvPr>
+          <p:cNvPicPr>
+            <a:picLocks noChangeAspect="1"/>
+          </p:cNvPicPr>
+          <p:nvPr/>
+        </p:nvPicPr>
+        <p:blipFill>
+          <a:blip r:embed="rId7"/>
+          <a:stretch>
+            <a:fillRect/>
+          </a:stretch>
+        </p:blipFill>
+        <p:spPr>
+          <a:xfrm>
+            <a:off x="10758767" y="6131363"/>
+            <a:ext cx="1324544" cy="566472"/>
+          </a:xfrm>
+          <a:prstGeom prst="rect">
+            <a:avLst/>
+          </a:prstGeom>
+        </p:spPr>
+      </p:pic>
     </p:spTree>
     <p:extLst>
       <p:ext uri="{BB962C8B-B14F-4D97-AF65-F5344CB8AC3E}">
@@ -33321,6 +33471,36 @@
           </a:fontRef>
         </p:style>
       </p:cxnSp>
+      <p:pic>
+        <p:nvPicPr>
+          <p:cNvPr id="4" name="Imagen 3">
+            <a:extLst>
+              <a:ext uri="{FF2B5EF4-FFF2-40B4-BE49-F238E27FC236}">
+                <a16:creationId xmlns:a16="http://schemas.microsoft.com/office/drawing/2014/main" id="{AFD8E16C-B778-7FA4-1EE3-A38954D53A6A}"/>
+              </a:ext>
+            </a:extLst>
+          </p:cNvPr>
+          <p:cNvPicPr>
+            <a:picLocks noChangeAspect="1"/>
+          </p:cNvPicPr>
+          <p:nvPr/>
+        </p:nvPicPr>
+        <p:blipFill>
+          <a:blip r:embed="rId3"/>
+          <a:stretch>
+            <a:fillRect/>
+          </a:stretch>
+        </p:blipFill>
+        <p:spPr>
+          <a:xfrm>
+            <a:off x="10758767" y="6131363"/>
+            <a:ext cx="1324544" cy="566472"/>
+          </a:xfrm>
+          <a:prstGeom prst="rect">
+            <a:avLst/>
+          </a:prstGeom>
+        </p:spPr>
+      </p:pic>
     </p:spTree>
     <p:extLst>
       <p:ext uri="{BB962C8B-B14F-4D97-AF65-F5344CB8AC3E}">
@@ -36358,6 +36538,36 @@
           </a:fontRef>
         </p:style>
       </p:cxnSp>
+      <p:pic>
+        <p:nvPicPr>
+          <p:cNvPr id="3" name="Imagen 2">
+            <a:extLst>
+              <a:ext uri="{FF2B5EF4-FFF2-40B4-BE49-F238E27FC236}">
+                <a16:creationId xmlns:a16="http://schemas.microsoft.com/office/drawing/2014/main" id="{EB223400-9256-66E2-D1C1-B25C2D9123A1}"/>
+              </a:ext>
+            </a:extLst>
+          </p:cNvPr>
+          <p:cNvPicPr>
+            <a:picLocks noChangeAspect="1"/>
+          </p:cNvPicPr>
+          <p:nvPr/>
+        </p:nvPicPr>
+        <p:blipFill>
+          <a:blip r:embed="rId3"/>
+          <a:stretch>
+            <a:fillRect/>
+          </a:stretch>
+        </p:blipFill>
+        <p:spPr>
+          <a:xfrm>
+            <a:off x="10758767" y="6131363"/>
+            <a:ext cx="1324544" cy="566472"/>
+          </a:xfrm>
+          <a:prstGeom prst="rect">
+            <a:avLst/>
+          </a:prstGeom>
+        </p:spPr>
+      </p:pic>
     </p:spTree>
     <p:extLst>
       <p:ext uri="{BB962C8B-B14F-4D97-AF65-F5344CB8AC3E}">
@@ -39451,6 +39661,36 @@
           </a:fontRef>
         </p:style>
       </p:cxnSp>
+      <p:pic>
+        <p:nvPicPr>
+          <p:cNvPr id="3" name="Imagen 2">
+            <a:extLst>
+              <a:ext uri="{FF2B5EF4-FFF2-40B4-BE49-F238E27FC236}">
+                <a16:creationId xmlns:a16="http://schemas.microsoft.com/office/drawing/2014/main" id="{45A8A08D-E6B3-96C7-37CC-066DB16D088D}"/>
+              </a:ext>
+            </a:extLst>
+          </p:cNvPr>
+          <p:cNvPicPr>
+            <a:picLocks noChangeAspect="1"/>
+          </p:cNvPicPr>
+          <p:nvPr/>
+        </p:nvPicPr>
+        <p:blipFill>
+          <a:blip r:embed="rId3"/>
+          <a:stretch>
+            <a:fillRect/>
+          </a:stretch>
+        </p:blipFill>
+        <p:spPr>
+          <a:xfrm>
+            <a:off x="10758767" y="6131363"/>
+            <a:ext cx="1324544" cy="566472"/>
+          </a:xfrm>
+          <a:prstGeom prst="rect">
+            <a:avLst/>
+          </a:prstGeom>
+        </p:spPr>
+      </p:pic>
     </p:spTree>
     <p:extLst>
       <p:ext uri="{BB962C8B-B14F-4D97-AF65-F5344CB8AC3E}">
@@ -40248,6 +40488,36 @@
           </a:fontRef>
         </p:style>
       </p:cxnSp>
+      <p:pic>
+        <p:nvPicPr>
+          <p:cNvPr id="4" name="Imagen 3">
+            <a:extLst>
+              <a:ext uri="{FF2B5EF4-FFF2-40B4-BE49-F238E27FC236}">
+                <a16:creationId xmlns:a16="http://schemas.microsoft.com/office/drawing/2014/main" id="{2DE145C7-715A-5206-6AE9-8D9AAE1F7BC9}"/>
+              </a:ext>
+            </a:extLst>
+          </p:cNvPr>
+          <p:cNvPicPr>
+            <a:picLocks noChangeAspect="1"/>
+          </p:cNvPicPr>
+          <p:nvPr/>
+        </p:nvPicPr>
+        <p:blipFill>
+          <a:blip r:embed="rId3"/>
+          <a:stretch>
+            <a:fillRect/>
+          </a:stretch>
+        </p:blipFill>
+        <p:spPr>
+          <a:xfrm>
+            <a:off x="10758767" y="6086393"/>
+            <a:ext cx="1324544" cy="566472"/>
+          </a:xfrm>
+          <a:prstGeom prst="rect">
+            <a:avLst/>
+          </a:prstGeom>
+        </p:spPr>
+      </p:pic>
     </p:spTree>
     <p:extLst>
       <p:ext uri="{BB962C8B-B14F-4D97-AF65-F5344CB8AC3E}">
@@ -41050,6 +41320,36 @@
               </a14:hiddenFill>
             </a:ext>
           </a:extLst>
+        </p:spPr>
+      </p:pic>
+      <p:pic>
+        <p:nvPicPr>
+          <p:cNvPr id="4" name="Imagen 3">
+            <a:extLst>
+              <a:ext uri="{FF2B5EF4-FFF2-40B4-BE49-F238E27FC236}">
+                <a16:creationId xmlns:a16="http://schemas.microsoft.com/office/drawing/2014/main" id="{345C4785-40DA-5C35-35DC-4DE1D73C7969}"/>
+              </a:ext>
+            </a:extLst>
+          </p:cNvPr>
+          <p:cNvPicPr>
+            <a:picLocks noChangeAspect="1"/>
+          </p:cNvPicPr>
+          <p:nvPr/>
+        </p:nvPicPr>
+        <p:blipFill>
+          <a:blip r:embed="rId3"/>
+          <a:stretch>
+            <a:fillRect/>
+          </a:stretch>
+        </p:blipFill>
+        <p:spPr>
+          <a:xfrm>
+            <a:off x="10758767" y="6131363"/>
+            <a:ext cx="1324544" cy="566472"/>
+          </a:xfrm>
+          <a:prstGeom prst="rect">
+            <a:avLst/>
+          </a:prstGeom>
         </p:spPr>
       </p:pic>
     </p:spTree>
@@ -41850,6 +42150,36 @@
           </a:fontRef>
         </p:style>
       </p:cxnSp>
+      <p:pic>
+        <p:nvPicPr>
+          <p:cNvPr id="4" name="Imagen 3">
+            <a:extLst>
+              <a:ext uri="{FF2B5EF4-FFF2-40B4-BE49-F238E27FC236}">
+                <a16:creationId xmlns:a16="http://schemas.microsoft.com/office/drawing/2014/main" id="{831D437A-BAB9-12D7-66D6-89E31072A198}"/>
+              </a:ext>
+            </a:extLst>
+          </p:cNvPr>
+          <p:cNvPicPr>
+            <a:picLocks noChangeAspect="1"/>
+          </p:cNvPicPr>
+          <p:nvPr/>
+        </p:nvPicPr>
+        <p:blipFill>
+          <a:blip r:embed="rId3"/>
+          <a:stretch>
+            <a:fillRect/>
+          </a:stretch>
+        </p:blipFill>
+        <p:spPr>
+          <a:xfrm>
+            <a:off x="10758767" y="6131363"/>
+            <a:ext cx="1324544" cy="566472"/>
+          </a:xfrm>
+          <a:prstGeom prst="rect">
+            <a:avLst/>
+          </a:prstGeom>
+        </p:spPr>
+      </p:pic>
     </p:spTree>
     <p:extLst>
       <p:ext uri="{BB962C8B-B14F-4D97-AF65-F5344CB8AC3E}">
@@ -42810,6 +43140,36 @@
           </a:graphicData>
         </a:graphic>
       </p:graphicFrame>
+      <p:pic>
+        <p:nvPicPr>
+          <p:cNvPr id="3" name="Imagen 2">
+            <a:extLst>
+              <a:ext uri="{FF2B5EF4-FFF2-40B4-BE49-F238E27FC236}">
+                <a16:creationId xmlns:a16="http://schemas.microsoft.com/office/drawing/2014/main" id="{1BBE5FF2-120E-8E1F-AF7E-55BC80140A78}"/>
+              </a:ext>
+            </a:extLst>
+          </p:cNvPr>
+          <p:cNvPicPr>
+            <a:picLocks noChangeAspect="1"/>
+          </p:cNvPicPr>
+          <p:nvPr/>
+        </p:nvPicPr>
+        <p:blipFill>
+          <a:blip r:embed="rId7"/>
+          <a:stretch>
+            <a:fillRect/>
+          </a:stretch>
+        </p:blipFill>
+        <p:spPr>
+          <a:xfrm>
+            <a:off x="10758767" y="6131363"/>
+            <a:ext cx="1324544" cy="566472"/>
+          </a:xfrm>
+          <a:prstGeom prst="rect">
+            <a:avLst/>
+          </a:prstGeom>
+        </p:spPr>
+      </p:pic>
     </p:spTree>
     <p:extLst>
       <p:ext uri="{BB962C8B-B14F-4D97-AF65-F5344CB8AC3E}">
@@ -43600,6 +43960,36 @@
           </a:fontRef>
         </p:style>
       </p:cxnSp>
+      <p:pic>
+        <p:nvPicPr>
+          <p:cNvPr id="4" name="Imagen 3">
+            <a:extLst>
+              <a:ext uri="{FF2B5EF4-FFF2-40B4-BE49-F238E27FC236}">
+                <a16:creationId xmlns:a16="http://schemas.microsoft.com/office/drawing/2014/main" id="{B3C9FAEE-7E83-B345-C732-C1F78E6696BE}"/>
+              </a:ext>
+            </a:extLst>
+          </p:cNvPr>
+          <p:cNvPicPr>
+            <a:picLocks noChangeAspect="1"/>
+          </p:cNvPicPr>
+          <p:nvPr/>
+        </p:nvPicPr>
+        <p:blipFill>
+          <a:blip r:embed="rId3"/>
+          <a:stretch>
+            <a:fillRect/>
+          </a:stretch>
+        </p:blipFill>
+        <p:spPr>
+          <a:xfrm>
+            <a:off x="10758767" y="6131363"/>
+            <a:ext cx="1324544" cy="566472"/>
+          </a:xfrm>
+          <a:prstGeom prst="rect">
+            <a:avLst/>
+          </a:prstGeom>
+        </p:spPr>
+      </p:pic>
     </p:spTree>
     <p:extLst>
       <p:ext uri="{BB962C8B-B14F-4D97-AF65-F5344CB8AC3E}">
@@ -43819,6 +44209,36 @@
           </a:graphicData>
         </a:graphic>
       </p:graphicFrame>
+      <p:pic>
+        <p:nvPicPr>
+          <p:cNvPr id="3" name="Imagen 2">
+            <a:extLst>
+              <a:ext uri="{FF2B5EF4-FFF2-40B4-BE49-F238E27FC236}">
+                <a16:creationId xmlns:a16="http://schemas.microsoft.com/office/drawing/2014/main" id="{B650DE84-E34F-F8A3-8593-EAAA0BF3BD3C}"/>
+              </a:ext>
+            </a:extLst>
+          </p:cNvPr>
+          <p:cNvPicPr>
+            <a:picLocks noChangeAspect="1"/>
+          </p:cNvPicPr>
+          <p:nvPr/>
+        </p:nvPicPr>
+        <p:blipFill>
+          <a:blip r:embed="rId7"/>
+          <a:stretch>
+            <a:fillRect/>
+          </a:stretch>
+        </p:blipFill>
+        <p:spPr>
+          <a:xfrm>
+            <a:off x="10758767" y="6131363"/>
+            <a:ext cx="1324544" cy="566472"/>
+          </a:xfrm>
+          <a:prstGeom prst="rect">
+            <a:avLst/>
+          </a:prstGeom>
+        </p:spPr>
+      </p:pic>
     </p:spTree>
     <p:extLst>
       <p:ext uri="{BB962C8B-B14F-4D97-AF65-F5344CB8AC3E}">
@@ -44694,6 +45114,36 @@
           </a:fontRef>
         </p:style>
       </p:cxnSp>
+      <p:pic>
+        <p:nvPicPr>
+          <p:cNvPr id="3" name="Imagen 2">
+            <a:extLst>
+              <a:ext uri="{FF2B5EF4-FFF2-40B4-BE49-F238E27FC236}">
+                <a16:creationId xmlns:a16="http://schemas.microsoft.com/office/drawing/2014/main" id="{5E857458-5001-489B-E3E0-07F86FC51288}"/>
+              </a:ext>
+            </a:extLst>
+          </p:cNvPr>
+          <p:cNvPicPr>
+            <a:picLocks noChangeAspect="1"/>
+          </p:cNvPicPr>
+          <p:nvPr/>
+        </p:nvPicPr>
+        <p:blipFill>
+          <a:blip r:embed="rId3"/>
+          <a:stretch>
+            <a:fillRect/>
+          </a:stretch>
+        </p:blipFill>
+        <p:spPr>
+          <a:xfrm>
+            <a:off x="10758767" y="6131363"/>
+            <a:ext cx="1324544" cy="566472"/>
+          </a:xfrm>
+          <a:prstGeom prst="rect">
+            <a:avLst/>
+          </a:prstGeom>
+        </p:spPr>
+      </p:pic>
     </p:spTree>
     <p:extLst>
       <p:ext uri="{BB962C8B-B14F-4D97-AF65-F5344CB8AC3E}">
@@ -45618,6 +46068,36 @@
           </a:fontRef>
         </p:style>
       </p:cxnSp>
+      <p:pic>
+        <p:nvPicPr>
+          <p:cNvPr id="3" name="Imagen 2">
+            <a:extLst>
+              <a:ext uri="{FF2B5EF4-FFF2-40B4-BE49-F238E27FC236}">
+                <a16:creationId xmlns:a16="http://schemas.microsoft.com/office/drawing/2014/main" id="{5C72F85C-D368-FEE3-979C-28E3FCAF0264}"/>
+              </a:ext>
+            </a:extLst>
+          </p:cNvPr>
+          <p:cNvPicPr>
+            <a:picLocks noChangeAspect="1"/>
+          </p:cNvPicPr>
+          <p:nvPr/>
+        </p:nvPicPr>
+        <p:blipFill>
+          <a:blip r:embed="rId3"/>
+          <a:stretch>
+            <a:fillRect/>
+          </a:stretch>
+        </p:blipFill>
+        <p:spPr>
+          <a:xfrm>
+            <a:off x="10758767" y="6131363"/>
+            <a:ext cx="1324544" cy="566472"/>
+          </a:xfrm>
+          <a:prstGeom prst="rect">
+            <a:avLst/>
+          </a:prstGeom>
+        </p:spPr>
+      </p:pic>
     </p:spTree>
     <p:extLst>
       <p:ext uri="{BB962C8B-B14F-4D97-AF65-F5344CB8AC3E}">
@@ -46490,6 +46970,36 @@
           </a:fontRef>
         </p:style>
       </p:cxnSp>
+      <p:pic>
+        <p:nvPicPr>
+          <p:cNvPr id="3" name="Imagen 2">
+            <a:extLst>
+              <a:ext uri="{FF2B5EF4-FFF2-40B4-BE49-F238E27FC236}">
+                <a16:creationId xmlns:a16="http://schemas.microsoft.com/office/drawing/2014/main" id="{66ADE41A-62E4-4D28-E748-832AC3B219B4}"/>
+              </a:ext>
+            </a:extLst>
+          </p:cNvPr>
+          <p:cNvPicPr>
+            <a:picLocks noChangeAspect="1"/>
+          </p:cNvPicPr>
+          <p:nvPr/>
+        </p:nvPicPr>
+        <p:blipFill>
+          <a:blip r:embed="rId3"/>
+          <a:stretch>
+            <a:fillRect/>
+          </a:stretch>
+        </p:blipFill>
+        <p:spPr>
+          <a:xfrm>
+            <a:off x="10758767" y="6131363"/>
+            <a:ext cx="1324544" cy="566472"/>
+          </a:xfrm>
+          <a:prstGeom prst="rect">
+            <a:avLst/>
+          </a:prstGeom>
+        </p:spPr>
+      </p:pic>
     </p:spTree>
     <p:extLst>
       <p:ext uri="{BB962C8B-B14F-4D97-AF65-F5344CB8AC3E}">
